--- a/ML_Reference_Architectures.pptx
+++ b/ML_Reference_Architectures.pptx
@@ -202,7 +202,7 @@
           <a:p>
             <a:fld id="{C2E15B94-D9E4-E149-8081-23A720D1EE5F}" type="datetimeFigureOut">
               <a:rPr lang="en-US" smtClean="0"/>
-              <a:t>4/26/21</a:t>
+              <a:t>5/4/21</a:t>
             </a:fld>
             <a:endParaRPr lang="en-US"/>
           </a:p>
@@ -616,7 +616,7 @@
           <a:p>
             <a:fld id="{FBD852D7-E694-214E-8A12-510E0A0329D2}" type="datetimeFigureOut">
               <a:rPr lang="en-US" smtClean="0"/>
-              <a:t>4/26/21</a:t>
+              <a:t>5/4/21</a:t>
             </a:fld>
             <a:endParaRPr lang="en-US"/>
           </a:p>
@@ -814,7 +814,7 @@
           <a:p>
             <a:fld id="{FBD852D7-E694-214E-8A12-510E0A0329D2}" type="datetimeFigureOut">
               <a:rPr lang="en-US" smtClean="0"/>
-              <a:t>4/26/21</a:t>
+              <a:t>5/4/21</a:t>
             </a:fld>
             <a:endParaRPr lang="en-US"/>
           </a:p>
@@ -1022,7 +1022,7 @@
           <a:p>
             <a:fld id="{FBD852D7-E694-214E-8A12-510E0A0329D2}" type="datetimeFigureOut">
               <a:rPr lang="en-US" smtClean="0"/>
-              <a:t>4/26/21</a:t>
+              <a:t>5/4/21</a:t>
             </a:fld>
             <a:endParaRPr lang="en-US"/>
           </a:p>
@@ -1220,7 +1220,7 @@
           <a:p>
             <a:fld id="{FBD852D7-E694-214E-8A12-510E0A0329D2}" type="datetimeFigureOut">
               <a:rPr lang="en-US" smtClean="0"/>
-              <a:t>4/26/21</a:t>
+              <a:t>5/4/21</a:t>
             </a:fld>
             <a:endParaRPr lang="en-US"/>
           </a:p>
@@ -1495,7 +1495,7 @@
           <a:p>
             <a:fld id="{FBD852D7-E694-214E-8A12-510E0A0329D2}" type="datetimeFigureOut">
               <a:rPr lang="en-US" smtClean="0"/>
-              <a:t>4/26/21</a:t>
+              <a:t>5/4/21</a:t>
             </a:fld>
             <a:endParaRPr lang="en-US"/>
           </a:p>
@@ -1760,7 +1760,7 @@
           <a:p>
             <a:fld id="{FBD852D7-E694-214E-8A12-510E0A0329D2}" type="datetimeFigureOut">
               <a:rPr lang="en-US" smtClean="0"/>
-              <a:t>4/26/21</a:t>
+              <a:t>5/4/21</a:t>
             </a:fld>
             <a:endParaRPr lang="en-US"/>
           </a:p>
@@ -2172,7 +2172,7 @@
           <a:p>
             <a:fld id="{FBD852D7-E694-214E-8A12-510E0A0329D2}" type="datetimeFigureOut">
               <a:rPr lang="en-US" smtClean="0"/>
-              <a:t>4/26/21</a:t>
+              <a:t>5/4/21</a:t>
             </a:fld>
             <a:endParaRPr lang="en-US"/>
           </a:p>
@@ -2313,7 +2313,7 @@
           <a:p>
             <a:fld id="{FBD852D7-E694-214E-8A12-510E0A0329D2}" type="datetimeFigureOut">
               <a:rPr lang="en-US" smtClean="0"/>
-              <a:t>4/26/21</a:t>
+              <a:t>5/4/21</a:t>
             </a:fld>
             <a:endParaRPr lang="en-US"/>
           </a:p>
@@ -2426,7 +2426,7 @@
           <a:p>
             <a:fld id="{FBD852D7-E694-214E-8A12-510E0A0329D2}" type="datetimeFigureOut">
               <a:rPr lang="en-US" smtClean="0"/>
-              <a:t>4/26/21</a:t>
+              <a:t>5/4/21</a:t>
             </a:fld>
             <a:endParaRPr lang="en-US"/>
           </a:p>
@@ -2737,7 +2737,7 @@
           <a:p>
             <a:fld id="{FBD852D7-E694-214E-8A12-510E0A0329D2}" type="datetimeFigureOut">
               <a:rPr lang="en-US" smtClean="0"/>
-              <a:t>4/26/21</a:t>
+              <a:t>5/4/21</a:t>
             </a:fld>
             <a:endParaRPr lang="en-US"/>
           </a:p>
@@ -3025,7 +3025,7 @@
           <a:p>
             <a:fld id="{FBD852D7-E694-214E-8A12-510E0A0329D2}" type="datetimeFigureOut">
               <a:rPr lang="en-US" smtClean="0"/>
-              <a:t>4/26/21</a:t>
+              <a:t>5/4/21</a:t>
             </a:fld>
             <a:endParaRPr lang="en-US"/>
           </a:p>
@@ -3266,7 +3266,7 @@
           <a:p>
             <a:fld id="{FBD852D7-E694-214E-8A12-510E0A0329D2}" type="datetimeFigureOut">
               <a:rPr lang="en-US" smtClean="0"/>
-              <a:t>4/26/21</a:t>
+              <a:t>5/4/21</a:t>
             </a:fld>
             <a:endParaRPr lang="en-US"/>
           </a:p>
@@ -3778,7 +3778,7 @@
         </p:nvSpPr>
         <p:spPr>
           <a:xfrm>
-            <a:off x="356259" y="1744476"/>
+            <a:off x="332508" y="2670747"/>
             <a:ext cx="5890162" cy="738664"/>
           </a:xfrm>
           <a:prstGeom prst="rect">
@@ -3835,7 +3835,7 @@
         </p:nvSpPr>
         <p:spPr>
           <a:xfrm>
-            <a:off x="1662545" y="3835730"/>
+            <a:off x="1638795" y="3847601"/>
             <a:ext cx="5242076" cy="738664"/>
           </a:xfrm>
           <a:prstGeom prst="rect">
@@ -3915,6 +3915,95 @@
           </a:extLst>
         </p:spPr>
       </p:pic>
+      <p:sp>
+        <p:nvSpPr>
+          <p:cNvPr id="3" name="TextBox 2">
+            <a:extLst>
+              <a:ext uri="{FF2B5EF4-FFF2-40B4-BE49-F238E27FC236}">
+                <a16:creationId xmlns:a16="http://schemas.microsoft.com/office/drawing/2014/main" id="{5712C7A5-24FB-2144-BC6C-F091E2630966}"/>
+              </a:ext>
+            </a:extLst>
+          </p:cNvPr>
+          <p:cNvSpPr txBox="1"/>
+          <p:nvPr/>
+        </p:nvSpPr>
+        <p:spPr>
+          <a:xfrm>
+            <a:off x="332508" y="1463623"/>
+            <a:ext cx="5890162" cy="954107"/>
+          </a:xfrm>
+          <a:prstGeom prst="rect">
+            <a:avLst/>
+          </a:prstGeom>
+          <a:noFill/>
+        </p:spPr>
+        <p:txBody>
+          <a:bodyPr wrap="square" rtlCol="0">
+            <a:spAutoFit/>
+          </a:bodyPr>
+          <a:lstStyle>
+            <a:defPPr>
+              <a:defRPr lang="en-US"/>
+            </a:defPPr>
+            <a:lvl1pPr>
+              <a:defRPr sz="1400"/>
+            </a:lvl1pPr>
+          </a:lstStyle>
+          <a:p>
+            <a:r>
+              <a:rPr lang="en-US" b="1" dirty="0" err="1">
+                <a:solidFill>
+                  <a:srgbClr val="FF0000"/>
+                </a:solidFill>
+              </a:rPr>
+              <a:t>MLOps</a:t>
+            </a:r>
+            <a:r>
+              <a:rPr lang="en-US" dirty="0"/>
+              <a:t>, </a:t>
+            </a:r>
+            <a:r>
+              <a:rPr lang="en-US" b="1" dirty="0">
+                <a:solidFill>
+                  <a:srgbClr val="FF0000"/>
+                </a:solidFill>
+              </a:rPr>
+              <a:t>AIOps</a:t>
+            </a:r>
+            <a:r>
+              <a:rPr lang="en-US" dirty="0"/>
+              <a:t> = </a:t>
+            </a:r>
+            <a:r>
+              <a:rPr lang="en-US" b="1" dirty="0">
+                <a:solidFill>
+                  <a:srgbClr val="FF0000"/>
+                </a:solidFill>
+              </a:rPr>
+              <a:t>DevOps</a:t>
+            </a:r>
+            <a:r>
+              <a:rPr lang="en-US" dirty="0"/>
+              <a:t> for ML &amp; AI.</a:t>
+            </a:r>
+          </a:p>
+          <a:p>
+            <a:endParaRPr lang="en-US" dirty="0"/>
+          </a:p>
+          <a:p>
+            <a:r>
+              <a:rPr lang="en-US" dirty="0"/>
+              <a:t>Taking an experimental Machine Learning or Artificial Intelligence </a:t>
+            </a:r>
+          </a:p>
+          <a:p>
+            <a:r>
+              <a:rPr lang="en-US" dirty="0"/>
+              <a:t>model into a production environment.</a:t>
+            </a:r>
+          </a:p>
+        </p:txBody>
+      </p:sp>
     </p:spTree>
     <p:extLst>
       <p:ext uri="{BB962C8B-B14F-4D97-AF65-F5344CB8AC3E}">

--- a/ML_Reference_Architectures.pptx
+++ b/ML_Reference_Architectures.pptx
@@ -3778,7 +3778,7 @@
         </p:nvSpPr>
         <p:spPr>
           <a:xfrm>
-            <a:off x="332508" y="2670747"/>
+            <a:off x="332508" y="3805928"/>
             <a:ext cx="5890162" cy="738664"/>
           </a:xfrm>
           <a:prstGeom prst="rect">
@@ -3794,29 +3794,27 @@
           <a:p>
             <a:r>
               <a:rPr lang="en-US" sz="1400" dirty="0"/>
-              <a:t>Nice Review</a:t>
-            </a:r>
-          </a:p>
-          <a:p>
+              <a:t>Nice Review about </a:t>
+            </a:r>
+            <a:r>
+              <a:rPr lang="en-US" sz="1400" dirty="0" err="1"/>
+              <a:t>MLOps</a:t>
+            </a:r>
             <a:r>
               <a:rPr lang="en-US" sz="1400" dirty="0"/>
-              <a:t>https://</a:t>
-            </a:r>
-            <a:r>
-              <a:rPr lang="en-US" sz="1400" dirty="0" err="1"/>
-              <a:t>medium.com</a:t>
+              <a:t> Reference Architectures</a:t>
+            </a:r>
+          </a:p>
+          <a:p>
+            <a:r>
+              <a:rPr lang="en-US" sz="1400" dirty="0">
+                <a:hlinkClick r:id="rId2"/>
+              </a:rPr>
+              <a:t>https://medium.com/dataseries/machine-learning-reference-architectures-from-google-facebook-uber-databricks-and-others-58191cf82b98</a:t>
             </a:r>
             <a:r>
               <a:rPr lang="en-US" sz="1400" dirty="0"/>
-              <a:t>/</a:t>
-            </a:r>
-            <a:r>
-              <a:rPr lang="en-US" sz="1400" dirty="0" err="1"/>
-              <a:t>dataseries</a:t>
-            </a:r>
-            <a:r>
-              <a:rPr lang="en-US" sz="1400" dirty="0"/>
-              <a:t>/machine-learning-reference-architectures-from-google-facebook-uber-databricks-and-others-58191cf82b98</a:t>
+              <a:t> </a:t>
             </a:r>
           </a:p>
         </p:txBody>
@@ -3835,8 +3833,8 @@
         </p:nvSpPr>
         <p:spPr>
           <a:xfrm>
-            <a:off x="1638795" y="3847601"/>
-            <a:ext cx="5242076" cy="738664"/>
+            <a:off x="332508" y="4821378"/>
+            <a:ext cx="4301947" cy="954107"/>
           </a:xfrm>
           <a:prstGeom prst="rect">
             <a:avLst/>
@@ -3851,19 +3849,41 @@
           <a:p>
             <a:r>
               <a:rPr lang="en-US" sz="1400" dirty="0"/>
-              <a:t>The lifecycle of machine learning solutions is fundamentally different </a:t>
+              <a:t>The lifecycle of Machine Learning solutions is </a:t>
             </a:r>
           </a:p>
           <a:p>
             <a:r>
               <a:rPr lang="en-US" sz="1400" dirty="0"/>
-              <a:t>than other software disciplines, because the deployed model needs</a:t>
+              <a:t>fundamentally different than other software disciplines, </a:t>
             </a:r>
           </a:p>
           <a:p>
             <a:r>
               <a:rPr lang="en-US" sz="1400" dirty="0"/>
-              <a:t>to be constantly re-trained and optimized.</a:t>
+              <a:t>because </a:t>
+            </a:r>
+            <a:r>
+              <a:rPr lang="en-US" sz="1400" b="1" dirty="0">
+                <a:solidFill>
+                  <a:srgbClr val="FF0000"/>
+                </a:solidFill>
+              </a:rPr>
+              <a:t>the deployed model needs to be constantly </a:t>
+            </a:r>
+          </a:p>
+          <a:p>
+            <a:r>
+              <a:rPr lang="en-US" sz="1400" b="1" dirty="0">
+                <a:solidFill>
+                  <a:srgbClr val="FF0000"/>
+                </a:solidFill>
+              </a:rPr>
+              <a:t>re-trained and optimized</a:t>
+            </a:r>
+            <a:r>
+              <a:rPr lang="en-US" sz="1400" dirty="0"/>
+              <a:t>.</a:t>
             </a:r>
           </a:p>
         </p:txBody>
@@ -3883,7 +3903,7 @@
           <p:nvPr/>
         </p:nvPicPr>
         <p:blipFill>
-          <a:blip r:embed="rId2" cstate="email">
+          <a:blip r:embed="rId3" cstate="email">
             <a:extLst>
               <a:ext uri="{28A0092B-C50C-407E-A947-70E740481C1C}">
                 <a14:useLocalDpi xmlns:a14="http://schemas.microsoft.com/office/drawing/2010/main"/>
@@ -3897,7 +3917,7 @@
         </p:blipFill>
         <p:spPr bwMode="auto">
           <a:xfrm>
-            <a:off x="7778338" y="2113808"/>
+            <a:off x="8087096" y="2066307"/>
             <a:ext cx="3891478" cy="3852563"/>
           </a:xfrm>
           <a:prstGeom prst="rect">
@@ -3929,8 +3949,8 @@
         </p:nvSpPr>
         <p:spPr>
           <a:xfrm>
-            <a:off x="332508" y="1463623"/>
-            <a:ext cx="5890162" cy="954107"/>
+            <a:off x="332508" y="1175837"/>
+            <a:ext cx="7600210" cy="2462213"/>
           </a:xfrm>
           <a:prstGeom prst="rect">
             <a:avLst/>
@@ -3959,47 +3979,113 @@
               <a:t>MLOps</a:t>
             </a:r>
             <a:r>
-              <a:rPr lang="en-US" dirty="0"/>
-              <a:t>, </a:t>
-            </a:r>
-            <a:r>
               <a:rPr lang="en-US" b="1" dirty="0">
                 <a:solidFill>
                   <a:srgbClr val="FF0000"/>
                 </a:solidFill>
               </a:rPr>
-              <a:t>AIOps</a:t>
-            </a:r>
+              <a:t> = Machine Learning Operations</a:t>
+            </a:r>
+          </a:p>
+          <a:p>
+            <a:pPr marL="285750" indent="-285750">
+              <a:buFont typeface="Arial" panose="020B0604020202020204" pitchFamily="34" charset="0"/>
+              <a:buChar char="•"/>
+            </a:pPr>
             <a:r>
               <a:rPr lang="en-US" dirty="0"/>
-              <a:t> = </a:t>
-            </a:r>
+              <a:t>Standard Tools/frameworks to manage all stages of ML lifecycle as ongoing products.</a:t>
+            </a:r>
+          </a:p>
+          <a:p>
+            <a:pPr marL="285750" indent="-285750">
+              <a:buFont typeface="Arial" panose="020B0604020202020204" pitchFamily="34" charset="0"/>
+              <a:buChar char="•"/>
+            </a:pPr>
+            <a:r>
+              <a:rPr lang="en-US" dirty="0"/>
+              <a:t>It is basically DevOps for ML pipelines.</a:t>
+            </a:r>
+          </a:p>
+          <a:p>
+            <a:pPr marL="285750" indent="-285750">
+              <a:buFont typeface="Arial" panose="020B0604020202020204" pitchFamily="34" charset="0"/>
+              <a:buChar char="•"/>
+            </a:pPr>
+            <a:r>
+              <a:rPr lang="en-US" dirty="0"/>
+              <a:t>It covers building, scaling, deploying, monitoring, re-training ML products.</a:t>
+            </a:r>
+          </a:p>
+          <a:p>
+            <a:pPr marL="285750" indent="-285750">
+              <a:buFont typeface="Arial" panose="020B0604020202020204" pitchFamily="34" charset="0"/>
+              <a:buChar char="•"/>
+            </a:pPr>
+            <a:r>
+              <a:rPr lang="en-US" dirty="0"/>
+              <a:t>Google, Facebook, and other companies have their own frameworks (architectures) for that.</a:t>
+            </a:r>
+          </a:p>
+          <a:p>
+            <a:endParaRPr lang="en-US" dirty="0"/>
+          </a:p>
+          <a:p>
             <a:r>
               <a:rPr lang="en-US" b="1" dirty="0">
                 <a:solidFill>
                   <a:srgbClr val="FF0000"/>
                 </a:solidFill>
               </a:rPr>
-              <a:t>DevOps</a:t>
-            </a:r>
+              <a:t>AIOps = Artificial Intelligence Operations</a:t>
+            </a:r>
+          </a:p>
+          <a:p>
+            <a:pPr marL="285750" indent="-285750">
+              <a:buFont typeface="Arial" panose="020B0604020202020204" pitchFamily="34" charset="0"/>
+              <a:buChar char="•"/>
+            </a:pPr>
             <a:r>
               <a:rPr lang="en-US" dirty="0"/>
-              <a:t> for ML &amp; AI.</a:t>
-            </a:r>
-          </a:p>
-          <a:p>
-            <a:endParaRPr lang="en-US" dirty="0"/>
-          </a:p>
-          <a:p>
+              <a:t>Process to analyze, optimize, and automate the IT.</a:t>
+            </a:r>
+          </a:p>
+          <a:p>
+            <a:pPr marL="285750" indent="-285750">
+              <a:buFont typeface="Arial" panose="020B0604020202020204" pitchFamily="34" charset="0"/>
+              <a:buChar char="•"/>
+            </a:pPr>
             <a:r>
               <a:rPr lang="en-US" dirty="0"/>
-              <a:t>Taking an experimental Machine Learning or Artificial Intelligence </a:t>
-            </a:r>
-          </a:p>
-          <a:p>
+              <a:t>Uses data, analytics, and machine learning to analyze and improve IT infrastructure &amp; operations </a:t>
+            </a:r>
+          </a:p>
+          <a:p>
+            <a:pPr marL="285750" indent="-285750">
+              <a:buFont typeface="Arial" panose="020B0604020202020204" pitchFamily="34" charset="0"/>
+              <a:buChar char="•"/>
+            </a:pPr>
             <a:r>
               <a:rPr lang="en-US" dirty="0"/>
-              <a:t>model into a production environment.</a:t>
+              <a:t>Makes IT more efficient</a:t>
+            </a:r>
+          </a:p>
+          <a:p>
+            <a:pPr marL="285750" indent="-285750">
+              <a:buFont typeface="Arial" panose="020B0604020202020204" pitchFamily="34" charset="0"/>
+              <a:buChar char="•"/>
+            </a:pPr>
+            <a:r>
+              <a:rPr lang="en-US" dirty="0"/>
+              <a:t>Effectively automates DevOps and </a:t>
+            </a:r>
+            <a:r>
+              <a:rPr lang="en-US" dirty="0" err="1"/>
+              <a:t>DataOps</a:t>
+            </a:r>
+            <a:r>
+              <a:rPr lang="en-US" dirty="0"/>
+              <a:t>.</a:t>
             </a:r>
           </a:p>
         </p:txBody>
